--- a/cursos/recursos/arbitro-nacional/05-jugada-ilegal-cuando-queda-completada-y-como-se-sanciona.pptx
+++ b/cursos/recursos/arbitro-nacional/05-jugada-ilegal-cuando-queda-completada-y-como-se-sanciona.pptx
@@ -3712,7 +3712,7 @@
                 </a:solidFill>
                 <a:latin typeface="Calibri"/>
               </a:rPr>
-              <a:t>Una jugada ilegal queda completada en el mismo momento que cualquier otra (al soltar la pieza), pero el artículo 7.5.1 obliga a deshacerla apenas se detecta: se restablece la posición de antes de esa jugada y el jugador debe hacer una jugada legal, con la misma pieza si tenía alguna jugada legal disponible.</a:t>
+              <a:t>Una jugada ilegal queda completada, dice el propio artículo 7.5.1, recién al presionar el reloj — no al soltar la pieza. Por eso, mientras el reloj siga sin presionar, el jugador puede corregirla sin sanción, aunque ya la haya soltado en el tablero (respetando la pieza tocada). Completada y detectada DURANTE la partida, se restablece la posición de antes de esa jugada y el jugador debe hacer una jugada legal, con la misma pieza si tenía alguna jugada legal disponible.</a:t>
             </a:r>
           </a:p>
         </p:txBody>
@@ -4198,7 +4198,7 @@
                 </a:solidFill>
                 <a:latin typeface="Calibri"/>
               </a:rPr>
-              <a:t>"Detectada" es la palabra clave: si nadie la nota y se siguen jugando varias jugadas más, el artículo 7.5.1 en principio ya no permite deshacerla (la partida sigue desde la posición actual), salvo que ambos jugadores estén de acuerdo o el árbitro decida lo contrario por las circunstancias — es una de las pocas zonas donde el criterio de sala pesa más que una regla fija, y por eso conviene decidirlo pronto, no cuando ya se jugaron diez jugadas más.</a:t>
+              <a:t>"Detectada" es la palabra clave, pero no del modo que parece a primera vista: el artículo 7.5.1 permite corregir una jugada ilegal en cualquier momento en que se encuentre MIENTRAS LA PARTIDA SIGA (no hay límite de cuántas jugadas pasaron); lo único que la vuelve irreversible es que la partida ya haya terminado — con los dos jugadores habiendo firmado la planilla o el resultado quedando claro de otra forma. Si la posición exacta de antes de la jugada ilegal no se puede reconstruir, la partida sigue desde la última posición identificable anterior a la irregularidad.</a:t>
             </a:r>
           </a:p>
         </p:txBody>
@@ -4441,7 +4441,7 @@
                 </a:solidFill>
                 <a:latin typeface="Calibri"/>
               </a:rPr>
-              <a:t>Distinto es el artículo 7.4: cuando se descubre que la posición inicial estaba mal puesta o los colores invertidos DESPUÉS de que avanzó la partida — ahí, salvo reglamento distinto del torneo, la partida sigue como está si ya se completaron varias jugadas, en vez de reiniciarse desde cero.</a:t>
+              <a:t>Ojo con no confundir esto con otras dos irregularidades del mismo artículo 7, que tienen reglas propias: si la POSICIÓN INICIAL de las piezas estaba mal armada (art. 7.2.1), la partida se anula entera y se juega de nuevo — no se corrige sobre la marcha; si lo que estaba mal era la ORIENTACIÓN del tablero (art. 7.2.2), la partida sigue igual, solo se traslada la posición a un tablero bien orientado; y si se jugó con los COLORES invertidos (art. 7.3), se reinicia con los colores correctos si hay menos de 10 jugadas hechas por cada bando, y si ya son 10 o más, la partida sigue como está.</a:t>
             </a:r>
           </a:p>
         </p:txBody>
